--- a/deck/namp-2026/out/2026_납품대금연동제_기대성과활용_투입체계_2p.pptx
+++ b/deck/namp-2026/out/2026_납품대금연동제_기대성과활용_투입체계_2p.pptx
@@ -2700,7 +2700,7 @@
       </p:sp>
       <p:pic>
         <p:nvPicPr>
-          <p:cNvPr id="60" name="Image 0" descr="/home/user/kstat-pm/deck/namp-2026/assets/s18-report.png">    </p:cNvPr>
+          <p:cNvPr id="60" name="Image 0" descr="s18-report">    </p:cNvPr>
           <p:cNvPicPr>
             <a:picLocks noChangeAspect="1"/>
           </p:cNvPicPr>
@@ -5204,7 +5204,7 @@
       </p:sp>
       <p:pic>
         <p:nvPicPr>
-          <p:cNvPr id="137" name="Image 1" descr="/home/user/kstat-pm/deck/namp-2026/assets/s18-icon1.png">    </p:cNvPr>
+          <p:cNvPr id="137" name="Image 1" descr="s18-icon1">    </p:cNvPr>
           <p:cNvPicPr>
             <a:picLocks noChangeAspect="1"/>
           </p:cNvPicPr>
@@ -5290,7 +5290,7 @@
       </p:sp>
       <p:pic>
         <p:nvPicPr>
-          <p:cNvPr id="139" name="Image 2" descr="/home/user/kstat-pm/deck/namp-2026/assets/s18-icon2.png">    </p:cNvPr>
+          <p:cNvPr id="139" name="Image 2" descr="s18-icon2">    </p:cNvPr>
           <p:cNvPicPr>
             <a:picLocks noChangeAspect="1"/>
           </p:cNvPicPr>
@@ -5356,7 +5356,7 @@
       </p:sp>
       <p:pic>
         <p:nvPicPr>
-          <p:cNvPr id="141" name="Image 3" descr="/home/user/kstat-pm/deck/namp-2026/assets/s18-icon3.png">    </p:cNvPr>
+          <p:cNvPr id="141" name="Image 3" descr="s18-icon3">    </p:cNvPr>
           <p:cNvPicPr>
             <a:picLocks noChangeAspect="1"/>
           </p:cNvPicPr>
